--- a/docs/hear-and-act-presentation.pptx
+++ b/docs/hear-and-act-presentation.pptx
@@ -3209,7 +3209,7 @@
                   <a:srgbClr val="FFFFFF"/>
                 </a:solidFill>
               </a:rPr>
-              <a:t>Built a working voice agent (Assembly + Ferbly) at the AssemblyAI hardware workshop, and REM PhysicalAI — an offline physical-AI system — at the ExecuTorch Hackathon.</a:t>
+              <a:t>Built a working voice agent at the AssemblyAI hardware workshop, and REM PhysicalAI — an offline physical-AI system — at the ExecuTorch Hackathon.</a:t>
             </a:r>
           </a:p>
         </p:txBody>
